--- a/curso/pptx/S06.pptx
+++ b/curso/pptx/S06.pptx
@@ -4559,7 +4559,7 @@
                 </a:solidFill>
                 <a:latin typeface="Nunito Sans"/>
               </a:rPr>
-              <a:t>伊克尔（Iker）在Instagram上读到：“空腹喝柠檬水能燃烧脂肪。这是一位健身网红说的，我们整个健身房的人都这么做。”伊克尔确信这是真的。</a:t>
+              <a:t>一个男孩在Instagram上读到：“空腹喝柠檬水能燃烧脂肪。这是一位健身网红说的，我们整个健身房的人都这么做。”这个男孩确信这是真的。</a:t>
             </a:r>
           </a:p>
         </p:txBody>
@@ -4657,7 +4657,7 @@
                 </a:solidFill>
                 <a:latin typeface="Nunito Sans"/>
               </a:rPr>
-              <a:t>伊克尔知道吗？不知道：光是确信还不够。他缺少好的理由。</a:t>
+              <a:t>这个男孩知道吗？不知道：光是确信还不够。他缺少好的理由。</a:t>
             </a:r>
           </a:p>
           <a:p>
@@ -4868,7 +4868,7 @@
                 </a:solidFill>
                 <a:latin typeface="Nunito Sans"/>
               </a:rPr>
-              <a:t>奥马尔（Omar）：“我肯定知道，柠檬水能减肥。我在一个有三百万播放量的视频里看到的。”</a:t>
+              <a:t>一个男孩：“我肯定知道，柠檬水能减肥。我在一个有三百万播放量的视频里看到的。”</a:t>
             </a:r>
           </a:p>
         </p:txBody>
